--- a/tree_pulling.pptx
+++ b/tree_pulling.pptx
@@ -6,6 +6,7 @@
   </p:sldMasterIdLst>
   <p:sldIdLst>
     <p:sldId id="264" r:id="rId2"/>
+    <p:sldId id="265" r:id="rId3"/>
   </p:sldIdLst>
   <p:sldSz cx="12192000" cy="6858000"/>
   <p:notesSz cx="6858000" cy="9144000"/>
@@ -258,7 +259,7 @@
           <a:lstStyle/>
           <a:p>
             <a:fld id="{16286276-9013-2A43-82D1-BA4685C95117}" type="datetimeFigureOut">
-              <a:t>1/29/23</a:t>
+              <a:t>3/31/26</a:t>
             </a:fld>
             <a:endParaRPr lang="en-US"/>
           </a:p>
@@ -454,7 +455,7 @@
           <a:lstStyle/>
           <a:p>
             <a:fld id="{16286276-9013-2A43-82D1-BA4685C95117}" type="datetimeFigureOut">
-              <a:t>1/29/23</a:t>
+              <a:t>3/31/26</a:t>
             </a:fld>
             <a:endParaRPr lang="en-US"/>
           </a:p>
@@ -660,7 +661,7 @@
           <a:lstStyle/>
           <a:p>
             <a:fld id="{16286276-9013-2A43-82D1-BA4685C95117}" type="datetimeFigureOut">
-              <a:t>1/29/23</a:t>
+              <a:t>3/31/26</a:t>
             </a:fld>
             <a:endParaRPr lang="en-US"/>
           </a:p>
@@ -856,7 +857,7 @@
           <a:lstStyle/>
           <a:p>
             <a:fld id="{16286276-9013-2A43-82D1-BA4685C95117}" type="datetimeFigureOut">
-              <a:t>1/29/23</a:t>
+              <a:t>3/31/26</a:t>
             </a:fld>
             <a:endParaRPr lang="en-US"/>
           </a:p>
@@ -1129,7 +1130,7 @@
           <a:lstStyle/>
           <a:p>
             <a:fld id="{16286276-9013-2A43-82D1-BA4685C95117}" type="datetimeFigureOut">
-              <a:t>1/29/23</a:t>
+              <a:t>3/31/26</a:t>
             </a:fld>
             <a:endParaRPr lang="en-US"/>
           </a:p>
@@ -1392,7 +1393,7 @@
           <a:lstStyle/>
           <a:p>
             <a:fld id="{16286276-9013-2A43-82D1-BA4685C95117}" type="datetimeFigureOut">
-              <a:t>1/29/23</a:t>
+              <a:t>3/31/26</a:t>
             </a:fld>
             <a:endParaRPr lang="en-US"/>
           </a:p>
@@ -1802,7 +1803,7 @@
           <a:lstStyle/>
           <a:p>
             <a:fld id="{16286276-9013-2A43-82D1-BA4685C95117}" type="datetimeFigureOut">
-              <a:t>1/29/23</a:t>
+              <a:t>3/31/26</a:t>
             </a:fld>
             <a:endParaRPr lang="en-US"/>
           </a:p>
@@ -1941,7 +1942,7 @@
           <a:lstStyle/>
           <a:p>
             <a:fld id="{16286276-9013-2A43-82D1-BA4685C95117}" type="datetimeFigureOut">
-              <a:t>1/29/23</a:t>
+              <a:t>3/31/26</a:t>
             </a:fld>
             <a:endParaRPr lang="en-US"/>
           </a:p>
@@ -2052,7 +2053,7 @@
           <a:lstStyle/>
           <a:p>
             <a:fld id="{16286276-9013-2A43-82D1-BA4685C95117}" type="datetimeFigureOut">
-              <a:t>1/29/23</a:t>
+              <a:t>3/31/26</a:t>
             </a:fld>
             <a:endParaRPr lang="en-US"/>
           </a:p>
@@ -2361,7 +2362,7 @@
           <a:lstStyle/>
           <a:p>
             <a:fld id="{16286276-9013-2A43-82D1-BA4685C95117}" type="datetimeFigureOut">
-              <a:t>1/29/23</a:t>
+              <a:t>3/31/26</a:t>
             </a:fld>
             <a:endParaRPr lang="en-US"/>
           </a:p>
@@ -2647,7 +2648,7 @@
           <a:lstStyle/>
           <a:p>
             <a:fld id="{16286276-9013-2A43-82D1-BA4685C95117}" type="datetimeFigureOut">
-              <a:t>1/29/23</a:t>
+              <a:t>3/31/26</a:t>
             </a:fld>
             <a:endParaRPr lang="en-US"/>
           </a:p>
@@ -2886,7 +2887,7 @@
           </a:lstStyle>
           <a:p>
             <a:fld id="{16286276-9013-2A43-82D1-BA4685C95117}" type="datetimeFigureOut">
-              <a:t>1/29/23</a:t>
+              <a:t>3/31/26</a:t>
             </a:fld>
             <a:endParaRPr lang="en-US"/>
           </a:p>
@@ -3403,7 +3404,13 @@
           <p:nvPr/>
         </p:nvPicPr>
         <p:blipFill>
-          <a:blip r:embed="rId2"/>
+          <a:blip r:embed="rId2" cstate="email">
+            <a:extLst>
+              <a:ext uri="{28A0092B-C50C-407E-A947-70E740481C1C}">
+                <a14:useLocalDpi xmlns:a14="http://schemas.microsoft.com/office/drawing/2010/main"/>
+              </a:ext>
+            </a:extLst>
+          </a:blip>
           <a:stretch>
             <a:fillRect/>
           </a:stretch>
@@ -3433,7 +3440,13 @@
           <p:nvPr/>
         </p:nvPicPr>
         <p:blipFill>
-          <a:blip r:embed="rId3"/>
+          <a:blip r:embed="rId3" cstate="email">
+            <a:extLst>
+              <a:ext uri="{28A0092B-C50C-407E-A947-70E740481C1C}">
+                <a14:useLocalDpi xmlns:a14="http://schemas.microsoft.com/office/drawing/2010/main"/>
+              </a:ext>
+            </a:extLst>
+          </a:blip>
           <a:stretch>
             <a:fillRect/>
           </a:stretch>
@@ -3463,7 +3476,13 @@
           <p:nvPr/>
         </p:nvPicPr>
         <p:blipFill>
-          <a:blip r:embed="rId4"/>
+          <a:blip r:embed="rId4" cstate="email">
+            <a:extLst>
+              <a:ext uri="{28A0092B-C50C-407E-A947-70E740481C1C}">
+                <a14:useLocalDpi xmlns:a14="http://schemas.microsoft.com/office/drawing/2010/main"/>
+              </a:ext>
+            </a:extLst>
+          </a:blip>
           <a:stretch>
             <a:fillRect/>
           </a:stretch>
@@ -3493,7 +3512,13 @@
           <p:nvPr/>
         </p:nvPicPr>
         <p:blipFill>
-          <a:blip r:embed="rId5"/>
+          <a:blip r:embed="rId5" cstate="email">
+            <a:extLst>
+              <a:ext uri="{28A0092B-C50C-407E-A947-70E740481C1C}">
+                <a14:useLocalDpi xmlns:a14="http://schemas.microsoft.com/office/drawing/2010/main"/>
+              </a:ext>
+            </a:extLst>
+          </a:blip>
           <a:stretch>
             <a:fillRect/>
           </a:stretch>
@@ -3523,7 +3548,13 @@
           <p:nvPr/>
         </p:nvPicPr>
         <p:blipFill>
-          <a:blip r:embed="rId6"/>
+          <a:blip r:embed="rId6" cstate="email">
+            <a:extLst>
+              <a:ext uri="{28A0092B-C50C-407E-A947-70E740481C1C}">
+                <a14:useLocalDpi xmlns:a14="http://schemas.microsoft.com/office/drawing/2010/main"/>
+              </a:ext>
+            </a:extLst>
+          </a:blip>
           <a:stretch>
             <a:fillRect/>
           </a:stretch>
@@ -3542,6 +3573,327 @@
     <p:extLst>
       <p:ext uri="{BB962C8B-B14F-4D97-AF65-F5344CB8AC3E}">
         <p14:creationId xmlns:p14="http://schemas.microsoft.com/office/powerpoint/2010/main" val="2315358803"/>
+      </p:ext>
+    </p:extLst>
+  </p:cSld>
+  <p:clrMapOvr>
+    <a:masterClrMapping/>
+  </p:clrMapOvr>
+</p:sld>
+</file>
+
+<file path=ppt/slides/slide2.xml><?xml version="1.0" encoding="utf-8"?>
+<p:sld xmlns:a="http://schemas.openxmlformats.org/drawingml/2006/main" xmlns:r="http://schemas.openxmlformats.org/officeDocument/2006/relationships" xmlns:p="http://schemas.openxmlformats.org/presentationml/2006/main">
+  <p:cSld>
+    <p:spTree>
+      <p:nvGrpSpPr>
+        <p:cNvPr id="1" name="">
+          <a:extLst>
+            <a:ext uri="{FF2B5EF4-FFF2-40B4-BE49-F238E27FC236}">
+              <a16:creationId xmlns:a16="http://schemas.microsoft.com/office/drawing/2014/main" id="{6621EB4B-F34E-A997-A860-9B8D4508F8C0}"/>
+            </a:ext>
+          </a:extLst>
+        </p:cNvPr>
+        <p:cNvGrpSpPr/>
+        <p:nvPr/>
+      </p:nvGrpSpPr>
+      <p:grpSpPr>
+        <a:xfrm>
+          <a:off x="0" y="0"/>
+          <a:ext cx="0" cy="0"/>
+          <a:chOff x="0" y="0"/>
+          <a:chExt cx="0" cy="0"/>
+        </a:xfrm>
+      </p:grpSpPr>
+      <p:sp>
+        <p:nvSpPr>
+          <p:cNvPr id="2" name="TextBox 1">
+            <a:extLst>
+              <a:ext uri="{FF2B5EF4-FFF2-40B4-BE49-F238E27FC236}">
+                <a16:creationId xmlns:a16="http://schemas.microsoft.com/office/drawing/2014/main" id="{1039FFAF-7E80-4978-13E8-8AACF73C92AB}"/>
+              </a:ext>
+            </a:extLst>
+          </p:cNvPr>
+          <p:cNvSpPr txBox="1"/>
+          <p:nvPr/>
+        </p:nvSpPr>
+        <p:spPr>
+          <a:xfrm>
+            <a:off x="89208" y="200723"/>
+            <a:ext cx="5286704" cy="523220"/>
+          </a:xfrm>
+          <a:prstGeom prst="rect">
+            <a:avLst/>
+          </a:prstGeom>
+          <a:noFill/>
+        </p:spPr>
+        <p:txBody>
+          <a:bodyPr wrap="square" rtlCol="0">
+            <a:spAutoFit/>
+          </a:bodyPr>
+          <a:lstStyle/>
+          <a:p>
+            <a:r>
+              <a:rPr lang="en-US" sz="2800" b="1" dirty="0">
+                <a:latin typeface="Calibri" panose="020F0502020204030204" pitchFamily="34" charset="0"/>
+                <a:cs typeface="Calibri" panose="020F0502020204030204" pitchFamily="34" charset="0"/>
+              </a:rPr>
+              <a:t>Jameson Rope Sniper</a:t>
+            </a:r>
+          </a:p>
+        </p:txBody>
+      </p:sp>
+      <p:sp>
+        <p:nvSpPr>
+          <p:cNvPr id="3" name="TextBox 2">
+            <a:extLst>
+              <a:ext uri="{FF2B5EF4-FFF2-40B4-BE49-F238E27FC236}">
+                <a16:creationId xmlns:a16="http://schemas.microsoft.com/office/drawing/2014/main" id="{48FB6A26-F3E1-1FE1-F1E0-65614CEB0E6A}"/>
+              </a:ext>
+            </a:extLst>
+          </p:cNvPr>
+          <p:cNvSpPr txBox="1"/>
+          <p:nvPr/>
+        </p:nvSpPr>
+        <p:spPr>
+          <a:xfrm>
+            <a:off x="341457" y="810323"/>
+            <a:ext cx="5034455" cy="2246769"/>
+          </a:xfrm>
+          <a:prstGeom prst="rect">
+            <a:avLst/>
+          </a:prstGeom>
+          <a:noFill/>
+        </p:spPr>
+        <p:txBody>
+          <a:bodyPr wrap="square" rtlCol="0">
+            <a:spAutoFit/>
+          </a:bodyPr>
+          <a:lstStyle/>
+          <a:p>
+            <a:pPr marL="285750" indent="-285750">
+              <a:buFont typeface="Arial" panose="020B0604020202020204" pitchFamily="34" charset="0"/>
+              <a:buChar char="•"/>
+            </a:pPr>
+            <a:r>
+              <a:rPr lang="en-US" sz="1400" dirty="0"/>
+              <a:t>Jameson Rope Sniper™ (RS-TC-1) is a tool with a swinging frame/guide to place the rope around a branch or a pole.</a:t>
+            </a:r>
+          </a:p>
+          <a:p>
+            <a:pPr marL="285750" indent="-285750">
+              <a:buFont typeface="Arial" panose="020B0604020202020204" pitchFamily="34" charset="0"/>
+              <a:buChar char="•"/>
+            </a:pPr>
+            <a:r>
+              <a:rPr lang="en-US" sz="1400" dirty="0"/>
+              <a:t>The tool is $75 on amazon. </a:t>
+            </a:r>
+          </a:p>
+          <a:p>
+            <a:pPr marL="285750" indent="-285750">
+              <a:buFont typeface="Arial" panose="020B0604020202020204" pitchFamily="34" charset="0"/>
+              <a:buChar char="•"/>
+            </a:pPr>
+            <a:r>
+              <a:rPr lang="en-US" sz="1400" dirty="0"/>
+              <a:t>You mount it on the end of a standard Jameson extension pole (or any compatible 1¼" ferrule pole). </a:t>
+            </a:r>
+          </a:p>
+          <a:p>
+            <a:pPr marL="285750" indent="-285750">
+              <a:buFont typeface="Arial" panose="020B0604020202020204" pitchFamily="34" charset="0"/>
+              <a:buChar char="•"/>
+            </a:pPr>
+            <a:r>
+              <a:rPr lang="en-US" sz="1400" dirty="0"/>
+              <a:t>You load your rope into the swinging frame/guide, extend the pole up to the branch or utility pole, and release, dropping the rope precisely where you want it</a:t>
+            </a:r>
+          </a:p>
+          <a:p>
+            <a:pPr marL="285750" indent="-285750">
+              <a:buFont typeface="Arial" panose="020B0604020202020204" pitchFamily="34" charset="0"/>
+              <a:buChar char="•"/>
+            </a:pPr>
+            <a:r>
+              <a:rPr lang="en-US" sz="1400" dirty="0"/>
+              <a:t>It works with throwlines, climbing ropes, and rigging ropes up to 1" in diameter.</a:t>
+            </a:r>
+          </a:p>
+        </p:txBody>
+      </p:sp>
+      <p:pic>
+        <p:nvPicPr>
+          <p:cNvPr id="4" name="Picture 3">
+            <a:extLst>
+              <a:ext uri="{FF2B5EF4-FFF2-40B4-BE49-F238E27FC236}">
+                <a16:creationId xmlns:a16="http://schemas.microsoft.com/office/drawing/2014/main" id="{2BDAE87E-88FF-CA55-DC52-EFA97E27E505}"/>
+              </a:ext>
+            </a:extLst>
+          </p:cNvPr>
+          <p:cNvPicPr>
+            <a:picLocks noChangeAspect="1"/>
+          </p:cNvPicPr>
+          <p:nvPr/>
+        </p:nvPicPr>
+        <p:blipFill>
+          <a:blip r:embed="rId2" cstate="email">
+            <a:extLst>
+              <a:ext uri="{28A0092B-C50C-407E-A947-70E740481C1C}">
+                <a14:useLocalDpi xmlns:a14="http://schemas.microsoft.com/office/drawing/2010/main"/>
+              </a:ext>
+            </a:extLst>
+          </a:blip>
+          <a:stretch>
+            <a:fillRect/>
+          </a:stretch>
+        </p:blipFill>
+        <p:spPr>
+          <a:xfrm>
+            <a:off x="5703207" y="200723"/>
+            <a:ext cx="1569965" cy="2246769"/>
+          </a:xfrm>
+          <a:prstGeom prst="rect">
+            <a:avLst/>
+          </a:prstGeom>
+        </p:spPr>
+      </p:pic>
+      <p:sp>
+        <p:nvSpPr>
+          <p:cNvPr id="7" name="TextBox 6">
+            <a:extLst>
+              <a:ext uri="{FF2B5EF4-FFF2-40B4-BE49-F238E27FC236}">
+                <a16:creationId xmlns:a16="http://schemas.microsoft.com/office/drawing/2014/main" id="{7DA8AF0E-0B2D-FF41-CAB0-5C70F66BA307}"/>
+              </a:ext>
+            </a:extLst>
+          </p:cNvPr>
+          <p:cNvSpPr txBox="1"/>
+          <p:nvPr/>
+        </p:nvSpPr>
+        <p:spPr>
+          <a:xfrm>
+            <a:off x="325128" y="3439223"/>
+            <a:ext cx="5034455" cy="523220"/>
+          </a:xfrm>
+          <a:prstGeom prst="rect">
+            <a:avLst/>
+          </a:prstGeom>
+          <a:noFill/>
+        </p:spPr>
+        <p:txBody>
+          <a:bodyPr wrap="square" rtlCol="0">
+            <a:spAutoFit/>
+          </a:bodyPr>
+          <a:lstStyle/>
+          <a:p>
+            <a:pPr marL="285750" indent="-285750">
+              <a:buFont typeface="Arial" panose="020B0604020202020204" pitchFamily="34" charset="0"/>
+              <a:buChar char="•"/>
+            </a:pPr>
+            <a:r>
+              <a:rPr lang="en-US" sz="1400" dirty="0"/>
+              <a:t>Other option - Arborist Slingshot  - allows to throw the line rope. It is attached to the end of the pole.</a:t>
+            </a:r>
+          </a:p>
+        </p:txBody>
+      </p:sp>
+      <p:pic>
+        <p:nvPicPr>
+          <p:cNvPr id="8" name="Picture 7">
+            <a:extLst>
+              <a:ext uri="{FF2B5EF4-FFF2-40B4-BE49-F238E27FC236}">
+                <a16:creationId xmlns:a16="http://schemas.microsoft.com/office/drawing/2014/main" id="{CDF7E842-18F2-0CE4-CF00-3A0187EB188D}"/>
+              </a:ext>
+            </a:extLst>
+          </p:cNvPr>
+          <p:cNvPicPr>
+            <a:picLocks noChangeAspect="1"/>
+          </p:cNvPicPr>
+          <p:nvPr/>
+        </p:nvPicPr>
+        <p:blipFill>
+          <a:blip r:embed="rId3" cstate="email">
+            <a:extLst>
+              <a:ext uri="{28A0092B-C50C-407E-A947-70E740481C1C}">
+                <a14:useLocalDpi xmlns:a14="http://schemas.microsoft.com/office/drawing/2010/main"/>
+              </a:ext>
+            </a:extLst>
+          </a:blip>
+          <a:stretch>
+            <a:fillRect/>
+          </a:stretch>
+        </p:blipFill>
+        <p:spPr>
+          <a:xfrm>
+            <a:off x="5976256" y="2975213"/>
+            <a:ext cx="2449287" cy="2337151"/>
+          </a:xfrm>
+          <a:prstGeom prst="rect">
+            <a:avLst/>
+          </a:prstGeom>
+        </p:spPr>
+      </p:pic>
+      <p:sp>
+        <p:nvSpPr>
+          <p:cNvPr id="9" name="TextBox 8">
+            <a:extLst>
+              <a:ext uri="{FF2B5EF4-FFF2-40B4-BE49-F238E27FC236}">
+                <a16:creationId xmlns:a16="http://schemas.microsoft.com/office/drawing/2014/main" id="{C7D60BC4-6FFA-0207-FE46-26B1CD3F5935}"/>
+              </a:ext>
+            </a:extLst>
+          </p:cNvPr>
+          <p:cNvSpPr txBox="1"/>
+          <p:nvPr/>
+        </p:nvSpPr>
+        <p:spPr>
+          <a:xfrm>
+            <a:off x="325128" y="5249152"/>
+            <a:ext cx="5034455" cy="1169551"/>
+          </a:xfrm>
+          <a:prstGeom prst="rect">
+            <a:avLst/>
+          </a:prstGeom>
+          <a:noFill/>
+        </p:spPr>
+        <p:txBody>
+          <a:bodyPr wrap="square" rtlCol="0">
+            <a:spAutoFit/>
+          </a:bodyPr>
+          <a:lstStyle/>
+          <a:p>
+            <a:pPr marL="285750" indent="-285750">
+              <a:buFont typeface="Arial" panose="020B0604020202020204" pitchFamily="34" charset="0"/>
+              <a:buChar char="•"/>
+            </a:pPr>
+            <a:r>
+              <a:rPr lang="en-US" sz="1400" dirty="0"/>
+              <a:t>Another option is to simply throw a weight with rope attached.</a:t>
+            </a:r>
+          </a:p>
+          <a:p>
+            <a:pPr marL="285750" indent="-285750">
+              <a:buFont typeface="Arial" panose="020B0604020202020204" pitchFamily="34" charset="0"/>
+              <a:buChar char="•"/>
+            </a:pPr>
+            <a:r>
+              <a:rPr lang="en-US" sz="1400" dirty="0"/>
+              <a:t>Another option is to have a nail at the end of long pole, and hang a heavy nut with rope onto this nail. Lift it up around the branch, then turn the pole so that nut slip down from </a:t>
+            </a:r>
+            <a:r>
+              <a:rPr lang="en-US" sz="1400"/>
+              <a:t>the nail  </a:t>
+            </a:r>
+            <a:r>
+              <a:rPr lang="en-US" sz="1400" dirty="0"/>
+              <a:t>– thus pulling the rope around the branch and down</a:t>
+            </a:r>
+          </a:p>
+        </p:txBody>
+      </p:sp>
+    </p:spTree>
+    <p:extLst>
+      <p:ext uri="{BB962C8B-B14F-4D97-AF65-F5344CB8AC3E}">
+        <p14:creationId xmlns:p14="http://schemas.microsoft.com/office/powerpoint/2010/main" val="717936527"/>
       </p:ext>
     </p:extLst>
   </p:cSld>
